--- a/Slides/Semana 12/semana_12_slides.pptx
+++ b/Slides/Semana 12/semana_12_slides.pptx
@@ -708,15 +708,7 @@
           <a:p>
             <a:r>
               <a:rPr lang="en-US" dirty="0"/>
-              <a:t>FIGURA A PRODUZIR (nota do apresentador — não aparece no slide)
-Objetivo didático:
-Fixar visualmente a relação entre população, indivíduo, cromossomo, gene e aptidão antes de avançar para o ciclo completo do algoritmo.
-Arquivo sugerido:
-assets/anatomia-populacao-genetica.webp
-Descrição:
-Diagrama hierárquico: uma população contendo vários indivíduos; um indivíduo em destaque expandido em seu cromossomo (sequência de genes coloridos); ao lado, um rótulo indicando o valor de aptidão daquele indivíduo.
-Como produzir:
-Diagrama vetorial em Krita, com blocos retangulares para indivíduos e pequenos quadrados coloridos para genes dentro do cromossomo.</a:t>
+              <a:t/>
             </a:r>
             <a:endParaRPr lang="en-US" dirty="0"/>
           </a:p>
